--- a/classes/parte-15-seguridad-de-ia-y-machine-learning/300-gobernanza-y-etica-de-la-ia-segura/clase-300-presentacion.pptx
+++ b/classes/parte-15-seguridad-de-ia-y-machine-learning/300-gobernanza-y-etica-de-la-ia-segura/clase-300-presentacion.pptx
@@ -17,6 +17,10 @@
     <p:sldId id="265" r:id="rId16"/>
     <p:sldId id="266" r:id="rId17"/>
     <p:sldId id="267" r:id="rId18"/>
+    <p:sldId id="268" r:id="rId19"/>
+    <p:sldId id="269" r:id="rId20"/>
+    <p:sldId id="270" r:id="rId21"/>
+    <p:sldId id="271" r:id="rId22"/>
   </p:sldIdLst>
   <p:sldSz cx="9144000" cy="6858000" type="screen4x3"/>
   <p:notesSz cx="6858000" cy="9144000"/>
@@ -3198,7 +3202,7 @@
                   <a:srgbClr val="0B3D2E"/>
                 </a:solidFill>
               </a:rPr>
-              <a:t>⚠️ Errores comunes</a:t>
+              <a:t>🧪 Laboratorio guiado (gobernanza aplicada)</a:t>
             </a:r>
           </a:p>
         </p:txBody>
@@ -3236,67 +3240,97 @@
                   <a:srgbClr val="22282E"/>
                 </a:solidFill>
               </a:rPr>
-              <a:t>•  "Gobernanza = un documento que nadie usa" — Falta de roles y cadencia. Asigna dueños (RACI) y revisiones periódicas.</a:t>
-            </a:r>
-          </a:p>
-          <a:p>
-            <a:pPr>
-              <a:spcAft>
-                <a:spcPts val="600"/>
-              </a:spcAft>
-            </a:pPr>
-            <a:r>
-              <a:rPr sz="1500">
-                <a:solidFill>
-                  <a:srgbClr val="22282E"/>
-                </a:solidFill>
-              </a:rPr>
-              <a:t>•  Ignorar el EU AI Act por estar fuera de la UE — Es extraterritorial. Si operas con usuarios de la UE, aplica.</a:t>
-            </a:r>
-          </a:p>
-          <a:p>
-            <a:pPr>
-              <a:spcAft>
-                <a:spcPts val="600"/>
-              </a:spcAft>
-            </a:pPr>
-            <a:r>
-              <a:rPr sz="1500">
-                <a:solidFill>
-                  <a:srgbClr val="22282E"/>
-                </a:solidFill>
-              </a:rPr>
-              <a:t>•  Política sin métricas — No se puede gestionar lo que no se mide. Liga cada control a una métrica (Measure).</a:t>
-            </a:r>
-          </a:p>
-          <a:p>
-            <a:pPr>
-              <a:spcAft>
-                <a:spcPts val="600"/>
-              </a:spcAft>
-            </a:pPr>
-            <a:r>
-              <a:rPr sz="1500">
-                <a:solidFill>
-                  <a:srgbClr val="22282E"/>
-                </a:solidFill>
-              </a:rPr>
-              <a:t>•  Model card genérica y vacía — Sin límites ni sesgos declarados. Documenta riesgos de seguridad y equidad reales.</a:t>
-            </a:r>
-          </a:p>
-          <a:p>
-            <a:pPr>
-              <a:spcAft>
-                <a:spcPts val="600"/>
-              </a:spcAft>
-            </a:pPr>
-            <a:r>
-              <a:rPr sz="1500">
-                <a:solidFill>
-                  <a:srgbClr val="22282E"/>
-                </a:solidFill>
-              </a:rPr>
-              <a:t>•  Tratar ética y seguridad por separado — Se solapan (sesgo, transparencia, robustez). Intégralas en un mismo marco.</a:t>
+              <a:t>•  Ejercicio documental sobre un sistema de IA de caso.</a:t>
+            </a:r>
+          </a:p>
+          <a:p>
+            <a:pPr>
+              <a:spcAft>
+                <a:spcPts val="600"/>
+              </a:spcAft>
+            </a:pPr>
+            <a:r>
+              <a:rPr sz="1500">
+                <a:solidFill>
+                  <a:srgbClr val="22282E"/>
+                </a:solidFill>
+              </a:rPr>
+              <a:t>•  Elige el sistema. Por ejemplo el asistente RAG de la clase 297 o el detector de anomalías de la 298.</a:t>
+            </a:r>
+          </a:p>
+          <a:p>
+            <a:pPr>
+              <a:spcAft>
+                <a:spcPts val="600"/>
+              </a:spcAft>
+            </a:pPr>
+            <a:r>
+              <a:rPr sz="1500">
+                <a:solidFill>
+                  <a:srgbClr val="22282E"/>
+                </a:solidFill>
+              </a:rPr>
+              <a:t>•  Clasifícalo bajo el EU AI Act. Determina su categoría de riesgo (inaceptable/alto/limitado/mínimo) y lista las obligaciones asociadas (transparencia, supervisión humana, gestión de riesgos…</a:t>
+            </a:r>
+          </a:p>
+          <a:p>
+            <a:pPr>
+              <a:spcAft>
+                <a:spcPts val="600"/>
+              </a:spcAft>
+            </a:pPr>
+            <a:r>
+              <a:rPr sz="1500">
+                <a:solidFill>
+                  <a:srgbClr val="22282E"/>
+                </a:solidFill>
+              </a:rPr>
+              <a:t>•  Recorre NIST AI RMF.</a:t>
+            </a:r>
+          </a:p>
+          <a:p>
+            <a:pPr>
+              <a:spcAft>
+                <a:spcPts val="600"/>
+              </a:spcAft>
+            </a:pPr>
+            <a:r>
+              <a:rPr sz="1500">
+                <a:solidFill>
+                  <a:srgbClr val="22282E"/>
+                </a:solidFill>
+              </a:rPr>
+              <a:t>•  Map: contexto, propósito, partes interesadas, riesgos (incluye los técnicos de las clases 291–299).</a:t>
+            </a:r>
+          </a:p>
+          <a:p>
+            <a:pPr>
+              <a:spcAft>
+                <a:spcPts val="600"/>
+              </a:spcAft>
+            </a:pPr>
+            <a:r>
+              <a:rPr sz="1500">
+                <a:solidFill>
+                  <a:srgbClr val="22282E"/>
+                </a:solidFill>
+              </a:rPr>
+              <a:t>•  Measure: métricas de desempeño, robustez, sesgo, seguridad (p. ej. tasa de injection exitosa, FPR del detector).</a:t>
+            </a:r>
+          </a:p>
+          <a:p>
+            <a:pPr>
+              <a:spcAft>
+                <a:spcPts val="600"/>
+              </a:spcAft>
+            </a:pPr>
+            <a:r>
+              <a:rPr sz="1500">
+                <a:solidFill>
+                  <a:srgbClr val="22282E"/>
+                </a:solidFill>
+              </a:rPr>
+              <a:t>•  Manage: controles priorizados, plan de respuesta, aceptación/transferencia de riesgo.</a:t>
             </a:r>
           </a:p>
         </p:txBody>
@@ -3347,7 +3381,7 @@
                   <a:srgbClr val="0B3D2E"/>
                 </a:solidFill>
               </a:rPr>
-              <a:t>❓ Preguntas frecuentes</a:t>
+              <a:t>✍️ Ejercicios</a:t>
             </a:r>
           </a:p>
         </p:txBody>
@@ -3385,97 +3419,82 @@
                   <a:srgbClr val="22282E"/>
                 </a:solidFill>
               </a:rPr>
-              <a:t>•  ❓ ¿NIST AI RMF e ISO/IEC 42001 compiten?</a:t>
-            </a:r>
-          </a:p>
-          <a:p>
-            <a:pPr>
-              <a:spcAft>
-                <a:spcPts val="600"/>
-              </a:spcAft>
-            </a:pPr>
-            <a:r>
-              <a:rPr sz="1500">
-                <a:solidFill>
-                  <a:srgbClr val="22282E"/>
-                </a:solidFill>
-              </a:rPr>
-              <a:t>•  No. El AI RMF es un marco de gestión de riesgo (voluntario, muy operativo); ISO/IEC 42001 es una norma certificable de sistema de gestión. Muchas organizaciones usan el RMF para operar y la ISO para certificarse.</a:t>
-            </a:r>
-          </a:p>
-          <a:p>
-            <a:pPr>
-              <a:spcAft>
-                <a:spcPts val="600"/>
-              </a:spcAft>
-            </a:pPr>
-            <a:r>
-              <a:rPr sz="1500">
-                <a:solidFill>
-                  <a:srgbClr val="22282E"/>
-                </a:solidFill>
-              </a:rPr>
-              <a:t>•  ❓ ¿Toda IA cae bajo el EU AI Act?</a:t>
-            </a:r>
-          </a:p>
-          <a:p>
-            <a:pPr>
-              <a:spcAft>
-                <a:spcPts val="600"/>
-              </a:spcAft>
-            </a:pPr>
-            <a:r>
-              <a:rPr sz="1500">
-                <a:solidFill>
-                  <a:srgbClr val="22282E"/>
-                </a:solidFill>
-              </a:rPr>
-              <a:t>•  No con las mismas obligaciones. El Act es basado en riesgo: los usos de riesgo mínimo tienen cargas ligeras; los de alto riesgo (biometría, crédito, empleo, etc.) tienen requisitos estrictos; algunos usos están prohibidos.</a:t>
-            </a:r>
-          </a:p>
-          <a:p>
-            <a:pPr>
-              <a:spcAft>
-                <a:spcPts val="600"/>
-              </a:spcAft>
-            </a:pPr>
-            <a:r>
-              <a:rPr sz="1500">
-                <a:solidFill>
-                  <a:srgbClr val="22282E"/>
-                </a:solidFill>
-              </a:rPr>
-              <a:t>•  ❓ ¿Por qué mezclar seguridad y ética en la misma clase?</a:t>
-            </a:r>
-          </a:p>
-          <a:p>
-            <a:pPr>
-              <a:spcAft>
-                <a:spcPts val="600"/>
-              </a:spcAft>
-            </a:pPr>
-            <a:r>
-              <a:rPr sz="1500">
-                <a:solidFill>
-                  <a:srgbClr val="22282E"/>
-                </a:solidFill>
-              </a:rPr>
-              <a:t>•  Porque comparten problemas: el sesgo es un fallo de integridad; la transparencia habilita la auditoría de seguridad; la robustez protege tanto la seguridad como los derechos de las personas afectadas.</a:t>
-            </a:r>
-          </a:p>
-          <a:p>
-            <a:pPr>
-              <a:spcAft>
-                <a:spcPts val="600"/>
-              </a:spcAft>
-            </a:pPr>
-            <a:r>
-              <a:rPr sz="1500">
-                <a:solidFill>
-                  <a:srgbClr val="22282E"/>
-                </a:solidFill>
-              </a:rPr>
-              <a:t>•  ❓ ¿Qué documento entrego primero si tengo prisa?</a:t>
+              <a:t>•  Clasifica tres sistemas distintos bajo el EU AI Act y justifica.</a:t>
+            </a:r>
+          </a:p>
+          <a:p>
+            <a:pPr>
+              <a:spcAft>
+                <a:spcPts val="600"/>
+              </a:spcAft>
+            </a:pPr>
+            <a:r>
+              <a:rPr sz="1500">
+                <a:solidFill>
+                  <a:srgbClr val="22282E"/>
+                </a:solidFill>
+              </a:rPr>
+              <a:t>•  Mapea 5 riesgos técnicos de las clases 291–299 a las funciones del NIST AI RMF.</a:t>
+            </a:r>
+          </a:p>
+          <a:p>
+            <a:pPr>
+              <a:spcAft>
+                <a:spcPts val="600"/>
+              </a:spcAft>
+            </a:pPr>
+            <a:r>
+              <a:rPr sz="1500">
+                <a:solidFill>
+                  <a:srgbClr val="22282E"/>
+                </a:solidFill>
+              </a:rPr>
+              <a:t>•  Redacta 8 cláusulas de una política de uso aceptable de IA generativa.</a:t>
+            </a:r>
+          </a:p>
+          <a:p>
+            <a:pPr>
+              <a:spcAft>
+                <a:spcPts val="600"/>
+              </a:spcAft>
+            </a:pPr>
+            <a:r>
+              <a:rPr sz="1500">
+                <a:solidFill>
+                  <a:srgbClr val="22282E"/>
+                </a:solidFill>
+              </a:rPr>
+              <a:t>•  Completa una model card para un modelo que hayas usado en esta parte.</a:t>
+            </a:r>
+          </a:p>
+          <a:p>
+            <a:pPr>
+              <a:spcAft>
+                <a:spcPts val="600"/>
+              </a:spcAft>
+            </a:pPr>
+            <a:r>
+              <a:rPr sz="1500">
+                <a:solidFill>
+                  <a:srgbClr val="22282E"/>
+                </a:solidFill>
+              </a:rPr>
+              <a:t>•  Diseña la matriz RACI del ciclo de vida de un modelo de producción.</a:t>
+            </a:r>
+          </a:p>
+          <a:p>
+            <a:pPr>
+              <a:spcAft>
+                <a:spcPts val="600"/>
+              </a:spcAft>
+            </a:pPr>
+            <a:r>
+              <a:rPr sz="1500">
+                <a:solidFill>
+                  <a:srgbClr val="22282E"/>
+                </a:solidFill>
+              </a:rPr>
+              <a:t>•  Propón tres métricas de equidad y explica cuándo entran en conflicto.</a:t>
             </a:r>
           </a:p>
         </p:txBody>
@@ -3526,7 +3545,7 @@
                   <a:srgbClr val="0B3D2E"/>
                 </a:solidFill>
               </a:rPr>
-              <a:t>🔗 Referencias</a:t>
+              <a:t>📝 Reto verificable</a:t>
             </a:r>
           </a:p>
         </p:txBody>
@@ -3564,6 +3583,438 @@
                   <a:srgbClr val="22282E"/>
                 </a:solidFill>
               </a:rPr>
+              <a:t>•  Entrega un paquete de gobernanza de IA para un sistema concreto que incluya: clasificación EU AI Act justificada, cobertura de las cuatro funciones del NIST AI RMF, una política de uso aceptable, una…</a:t>
+            </a:r>
+          </a:p>
+          <a:p>
+            <a:pPr>
+              <a:spcAft>
+                <a:spcPts val="600"/>
+              </a:spcAft>
+            </a:pPr>
+            <a:r>
+              <a:rPr sz="1500">
+                <a:solidFill>
+                  <a:srgbClr val="22282E"/>
+                </a:solidFill>
+              </a:rPr>
+              <a:t>•  Criterio de aceptación: el paquete integra al menos 8 riesgos técnicos vistos en la parte (adversariales, envenenamiento, extracción, prompt injection, excessive agency, etc.), cada uno con un…</a:t>
+            </a:r>
+          </a:p>
+        </p:txBody>
+      </p:sp>
+    </p:spTree>
+  </p:cSld>
+  <p:clrMapOvr>
+    <a:masterClrMapping/>
+  </p:clrMapOvr>
+</p:sld>
+</file>
+
+<file path=ppt/slides/slide13.xml><?xml version="1.0" encoding="utf-8"?>
+<p:sld xmlns:a="http://schemas.openxmlformats.org/drawingml/2006/main" xmlns:p="http://schemas.openxmlformats.org/presentationml/2006/main" xmlns:r="http://schemas.openxmlformats.org/officeDocument/2006/relationships">
+  <p:cSld>
+    <p:spTree>
+      <p:nvGrpSpPr>
+        <p:cNvPr id="1" name=""/>
+        <p:cNvGrpSpPr/>
+        <p:nvPr/>
+      </p:nvGrpSpPr>
+      <p:grpSpPr/>
+      <p:sp>
+        <p:nvSpPr>
+          <p:cNvPr id="2" name="TextBox 1"/>
+          <p:cNvSpPr txBox="1"/>
+          <p:nvPr/>
+        </p:nvSpPr>
+        <p:spPr>
+          <a:xfrm>
+            <a:off x="457200" y="320040"/>
+            <a:ext cx="8229600" cy="822960"/>
+          </a:xfrm>
+          <a:prstGeom prst="rect">
+            <a:avLst/>
+          </a:prstGeom>
+          <a:noFill/>
+        </p:spPr>
+        <p:txBody>
+          <a:bodyPr wrap="square">
+            <a:spAutoFit/>
+          </a:bodyPr>
+          <a:lstStyle/>
+          <a:p>
+            <a:r>
+              <a:rPr sz="2600" b="1">
+                <a:solidFill>
+                  <a:srgbClr val="0B3D2E"/>
+                </a:solidFill>
+              </a:rPr>
+              <a:t>⚠️ Errores comunes</a:t>
+            </a:r>
+          </a:p>
+        </p:txBody>
+      </p:sp>
+      <p:sp>
+        <p:nvSpPr>
+          <p:cNvPr id="3" name="TextBox 2"/>
+          <p:cNvSpPr txBox="1"/>
+          <p:nvPr/>
+        </p:nvSpPr>
+        <p:spPr>
+          <a:xfrm>
+            <a:off x="457200" y="1280160"/>
+            <a:ext cx="8229600" cy="4937760"/>
+          </a:xfrm>
+          <a:prstGeom prst="rect">
+            <a:avLst/>
+          </a:prstGeom>
+          <a:noFill/>
+        </p:spPr>
+        <p:txBody>
+          <a:bodyPr wrap="square">
+            <a:spAutoFit/>
+          </a:bodyPr>
+          <a:lstStyle/>
+          <a:p>
+            <a:pPr>
+              <a:spcAft>
+                <a:spcPts val="600"/>
+              </a:spcAft>
+            </a:pPr>
+            <a:r>
+              <a:rPr sz="1500">
+                <a:solidFill>
+                  <a:srgbClr val="22282E"/>
+                </a:solidFill>
+              </a:rPr>
+              <a:t>•  "Gobernanza = un documento que nadie usa" — Falta de roles y cadencia. Asigna dueños (RACI) y revisiones periódicas.</a:t>
+            </a:r>
+          </a:p>
+          <a:p>
+            <a:pPr>
+              <a:spcAft>
+                <a:spcPts val="600"/>
+              </a:spcAft>
+            </a:pPr>
+            <a:r>
+              <a:rPr sz="1500">
+                <a:solidFill>
+                  <a:srgbClr val="22282E"/>
+                </a:solidFill>
+              </a:rPr>
+              <a:t>•  Ignorar el EU AI Act por estar fuera de la UE — Es extraterritorial. Si operas con usuarios de la UE, aplica.</a:t>
+            </a:r>
+          </a:p>
+          <a:p>
+            <a:pPr>
+              <a:spcAft>
+                <a:spcPts val="600"/>
+              </a:spcAft>
+            </a:pPr>
+            <a:r>
+              <a:rPr sz="1500">
+                <a:solidFill>
+                  <a:srgbClr val="22282E"/>
+                </a:solidFill>
+              </a:rPr>
+              <a:t>•  Política sin métricas — No se puede gestionar lo que no se mide. Liga cada control a una métrica (Measure).</a:t>
+            </a:r>
+          </a:p>
+          <a:p>
+            <a:pPr>
+              <a:spcAft>
+                <a:spcPts val="600"/>
+              </a:spcAft>
+            </a:pPr>
+            <a:r>
+              <a:rPr sz="1500">
+                <a:solidFill>
+                  <a:srgbClr val="22282E"/>
+                </a:solidFill>
+              </a:rPr>
+              <a:t>•  Model card genérica y vacía — Sin límites ni sesgos declarados. Documenta riesgos de seguridad y equidad reales.</a:t>
+            </a:r>
+          </a:p>
+          <a:p>
+            <a:pPr>
+              <a:spcAft>
+                <a:spcPts val="600"/>
+              </a:spcAft>
+            </a:pPr>
+            <a:r>
+              <a:rPr sz="1500">
+                <a:solidFill>
+                  <a:srgbClr val="22282E"/>
+                </a:solidFill>
+              </a:rPr>
+              <a:t>•  Tratar ética y seguridad por separado — Se solapan (sesgo, transparencia, robustez). Intégralas en un mismo marco.</a:t>
+            </a:r>
+          </a:p>
+        </p:txBody>
+      </p:sp>
+    </p:spTree>
+  </p:cSld>
+  <p:clrMapOvr>
+    <a:masterClrMapping/>
+  </p:clrMapOvr>
+</p:sld>
+</file>
+
+<file path=ppt/slides/slide14.xml><?xml version="1.0" encoding="utf-8"?>
+<p:sld xmlns:a="http://schemas.openxmlformats.org/drawingml/2006/main" xmlns:p="http://schemas.openxmlformats.org/presentationml/2006/main" xmlns:r="http://schemas.openxmlformats.org/officeDocument/2006/relationships">
+  <p:cSld>
+    <p:spTree>
+      <p:nvGrpSpPr>
+        <p:cNvPr id="1" name=""/>
+        <p:cNvGrpSpPr/>
+        <p:nvPr/>
+      </p:nvGrpSpPr>
+      <p:grpSpPr/>
+      <p:sp>
+        <p:nvSpPr>
+          <p:cNvPr id="2" name="TextBox 1"/>
+          <p:cNvSpPr txBox="1"/>
+          <p:nvPr/>
+        </p:nvSpPr>
+        <p:spPr>
+          <a:xfrm>
+            <a:off x="457200" y="320040"/>
+            <a:ext cx="8229600" cy="822960"/>
+          </a:xfrm>
+          <a:prstGeom prst="rect">
+            <a:avLst/>
+          </a:prstGeom>
+          <a:noFill/>
+        </p:spPr>
+        <p:txBody>
+          <a:bodyPr wrap="square">
+            <a:spAutoFit/>
+          </a:bodyPr>
+          <a:lstStyle/>
+          <a:p>
+            <a:r>
+              <a:rPr sz="2600" b="1">
+                <a:solidFill>
+                  <a:srgbClr val="0B3D2E"/>
+                </a:solidFill>
+              </a:rPr>
+              <a:t>❓ Preguntas frecuentes</a:t>
+            </a:r>
+          </a:p>
+        </p:txBody>
+      </p:sp>
+      <p:sp>
+        <p:nvSpPr>
+          <p:cNvPr id="3" name="TextBox 2"/>
+          <p:cNvSpPr txBox="1"/>
+          <p:nvPr/>
+        </p:nvSpPr>
+        <p:spPr>
+          <a:xfrm>
+            <a:off x="457200" y="1280160"/>
+            <a:ext cx="8229600" cy="4937760"/>
+          </a:xfrm>
+          <a:prstGeom prst="rect">
+            <a:avLst/>
+          </a:prstGeom>
+          <a:noFill/>
+        </p:spPr>
+        <p:txBody>
+          <a:bodyPr wrap="square">
+            <a:spAutoFit/>
+          </a:bodyPr>
+          <a:lstStyle/>
+          <a:p>
+            <a:pPr>
+              <a:spcAft>
+                <a:spcPts val="600"/>
+              </a:spcAft>
+            </a:pPr>
+            <a:r>
+              <a:rPr sz="1500">
+                <a:solidFill>
+                  <a:srgbClr val="22282E"/>
+                </a:solidFill>
+              </a:rPr>
+              <a:t>•  ❓ ¿NIST AI RMF e ISO/IEC 42001 compiten?</a:t>
+            </a:r>
+          </a:p>
+          <a:p>
+            <a:pPr>
+              <a:spcAft>
+                <a:spcPts val="600"/>
+              </a:spcAft>
+            </a:pPr>
+            <a:r>
+              <a:rPr sz="1500">
+                <a:solidFill>
+                  <a:srgbClr val="22282E"/>
+                </a:solidFill>
+              </a:rPr>
+              <a:t>•  No. El AI RMF es un marco de gestión de riesgo (voluntario, muy operativo); ISO/IEC 42001 es una norma certificable de sistema de gestión. Muchas organizaciones usan el RMF para operar y la ISO para…</a:t>
+            </a:r>
+          </a:p>
+          <a:p>
+            <a:pPr>
+              <a:spcAft>
+                <a:spcPts val="600"/>
+              </a:spcAft>
+            </a:pPr>
+            <a:r>
+              <a:rPr sz="1500">
+                <a:solidFill>
+                  <a:srgbClr val="22282E"/>
+                </a:solidFill>
+              </a:rPr>
+              <a:t>•  ❓ ¿Toda IA cae bajo el EU AI Act?</a:t>
+            </a:r>
+          </a:p>
+          <a:p>
+            <a:pPr>
+              <a:spcAft>
+                <a:spcPts val="600"/>
+              </a:spcAft>
+            </a:pPr>
+            <a:r>
+              <a:rPr sz="1500">
+                <a:solidFill>
+                  <a:srgbClr val="22282E"/>
+                </a:solidFill>
+              </a:rPr>
+              <a:t>•  No con las mismas obligaciones. El Act es basado en riesgo: los usos de riesgo mínimo tienen cargas ligeras; los de alto riesgo (biometría, crédito, empleo, etc.) tienen requisitos estrictos; algunos…</a:t>
+            </a:r>
+          </a:p>
+          <a:p>
+            <a:pPr>
+              <a:spcAft>
+                <a:spcPts val="600"/>
+              </a:spcAft>
+            </a:pPr>
+            <a:r>
+              <a:rPr sz="1500">
+                <a:solidFill>
+                  <a:srgbClr val="22282E"/>
+                </a:solidFill>
+              </a:rPr>
+              <a:t>•  ❓ ¿Por qué mezclar seguridad y ética en la misma clase?</a:t>
+            </a:r>
+          </a:p>
+          <a:p>
+            <a:pPr>
+              <a:spcAft>
+                <a:spcPts val="600"/>
+              </a:spcAft>
+            </a:pPr>
+            <a:r>
+              <a:rPr sz="1500">
+                <a:solidFill>
+                  <a:srgbClr val="22282E"/>
+                </a:solidFill>
+              </a:rPr>
+              <a:t>•  Porque comparten problemas: el sesgo es un fallo de integridad; la transparencia habilita la auditoría de seguridad; la robustez protege tanto la seguridad como los derechos de las personas afectadas.</a:t>
+            </a:r>
+          </a:p>
+          <a:p>
+            <a:pPr>
+              <a:spcAft>
+                <a:spcPts val="600"/>
+              </a:spcAft>
+            </a:pPr>
+            <a:r>
+              <a:rPr sz="1500">
+                <a:solidFill>
+                  <a:srgbClr val="22282E"/>
+                </a:solidFill>
+              </a:rPr>
+              <a:t>•  ❓ ¿Qué documento entrego primero si tengo prisa?</a:t>
+            </a:r>
+          </a:p>
+        </p:txBody>
+      </p:sp>
+    </p:spTree>
+  </p:cSld>
+  <p:clrMapOvr>
+    <a:masterClrMapping/>
+  </p:clrMapOvr>
+</p:sld>
+</file>
+
+<file path=ppt/slides/slide15.xml><?xml version="1.0" encoding="utf-8"?>
+<p:sld xmlns:a="http://schemas.openxmlformats.org/drawingml/2006/main" xmlns:p="http://schemas.openxmlformats.org/presentationml/2006/main" xmlns:r="http://schemas.openxmlformats.org/officeDocument/2006/relationships">
+  <p:cSld>
+    <p:spTree>
+      <p:nvGrpSpPr>
+        <p:cNvPr id="1" name=""/>
+        <p:cNvGrpSpPr/>
+        <p:nvPr/>
+      </p:nvGrpSpPr>
+      <p:grpSpPr/>
+      <p:sp>
+        <p:nvSpPr>
+          <p:cNvPr id="2" name="TextBox 1"/>
+          <p:cNvSpPr txBox="1"/>
+          <p:nvPr/>
+        </p:nvSpPr>
+        <p:spPr>
+          <a:xfrm>
+            <a:off x="457200" y="320040"/>
+            <a:ext cx="8229600" cy="822960"/>
+          </a:xfrm>
+          <a:prstGeom prst="rect">
+            <a:avLst/>
+          </a:prstGeom>
+          <a:noFill/>
+        </p:spPr>
+        <p:txBody>
+          <a:bodyPr wrap="square">
+            <a:spAutoFit/>
+          </a:bodyPr>
+          <a:lstStyle/>
+          <a:p>
+            <a:r>
+              <a:rPr sz="2600" b="1">
+                <a:solidFill>
+                  <a:srgbClr val="0B3D2E"/>
+                </a:solidFill>
+              </a:rPr>
+              <a:t>🔗 Referencias</a:t>
+            </a:r>
+          </a:p>
+        </p:txBody>
+      </p:sp>
+      <p:sp>
+        <p:nvSpPr>
+          <p:cNvPr id="3" name="TextBox 2"/>
+          <p:cNvSpPr txBox="1"/>
+          <p:nvPr/>
+        </p:nvSpPr>
+        <p:spPr>
+          <a:xfrm>
+            <a:off x="457200" y="1280160"/>
+            <a:ext cx="8229600" cy="4937760"/>
+          </a:xfrm>
+          <a:prstGeom prst="rect">
+            <a:avLst/>
+          </a:prstGeom>
+          <a:noFill/>
+        </p:spPr>
+        <p:txBody>
+          <a:bodyPr wrap="square">
+            <a:spAutoFit/>
+          </a:bodyPr>
+          <a:lstStyle/>
+          <a:p>
+            <a:pPr>
+              <a:spcAft>
+                <a:spcPts val="600"/>
+              </a:spcAft>
+            </a:pPr>
+            <a:r>
+              <a:rPr sz="1500">
+                <a:solidFill>
+                  <a:srgbClr val="22282E"/>
+                </a:solidFill>
+              </a:rPr>
               <a:t>•  NIST AI Risk Management Framework 1.0 — &lt;https://www.nist.gov/itl/ai-risk-management-framework&gt;</a:t>
             </a:r>
           </a:p>
@@ -3629,6 +4080,81 @@
           </a:p>
         </p:txBody>
       </p:sp>
+    </p:spTree>
+  </p:cSld>
+  <p:clrMapOvr>
+    <a:masterClrMapping/>
+  </p:clrMapOvr>
+</p:sld>
+</file>
+
+<file path=ppt/slides/slide16.xml><?xml version="1.0" encoding="utf-8"?>
+<p:sld xmlns:a="http://schemas.openxmlformats.org/drawingml/2006/main" xmlns:p="http://schemas.openxmlformats.org/presentationml/2006/main" xmlns:r="http://schemas.openxmlformats.org/officeDocument/2006/relationships">
+  <p:cSld>
+    <p:spTree>
+      <p:nvGrpSpPr>
+        <p:cNvPr id="1" name=""/>
+        <p:cNvGrpSpPr/>
+        <p:nvPr/>
+      </p:nvGrpSpPr>
+      <p:grpSpPr/>
+      <p:sp>
+        <p:nvSpPr>
+          <p:cNvPr id="2" name="TextBox 1"/>
+          <p:cNvSpPr txBox="1"/>
+          <p:nvPr/>
+        </p:nvSpPr>
+        <p:spPr>
+          <a:xfrm>
+            <a:off x="457200" y="274320"/>
+            <a:ext cx="8229600" cy="640080"/>
+          </a:xfrm>
+          <a:prstGeom prst="rect">
+            <a:avLst/>
+          </a:prstGeom>
+          <a:noFill/>
+        </p:spPr>
+        <p:txBody>
+          <a:bodyPr wrap="square">
+            <a:spAutoFit/>
+          </a:bodyPr>
+          <a:lstStyle/>
+          <a:p>
+            <a:r>
+              <a:rPr sz="2200" b="1">
+                <a:solidFill>
+                  <a:srgbClr val="0B3D2E"/>
+                </a:solidFill>
+              </a:rPr>
+              <a:t>Diagrama de la clase</a:t>
+            </a:r>
+          </a:p>
+        </p:txBody>
+      </p:sp>
+      <p:pic>
+        <p:nvPicPr>
+          <p:cNvPr id="3" name="Picture 2" descr="b7d457c3a28dae31.png"/>
+          <p:cNvPicPr>
+            <a:picLocks noChangeAspect="1"/>
+          </p:cNvPicPr>
+          <p:nvPr/>
+        </p:nvPicPr>
+        <p:blipFill>
+          <a:blip r:embed="rId2"/>
+          <a:stretch>
+            <a:fillRect/>
+          </a:stretch>
+        </p:blipFill>
+        <p:spPr>
+          <a:xfrm>
+            <a:off x="457200" y="3267374"/>
+            <a:ext cx="8229600" cy="963331"/>
+          </a:xfrm>
+          <a:prstGeom prst="rect">
+            <a:avLst/>
+          </a:prstGeom>
+        </p:spPr>
+      </p:pic>
     </p:spTree>
   </p:cSld>
   <p:clrMapOvr>
@@ -3713,7 +4239,7 @@
                   <a:srgbClr val="22282E"/>
                 </a:solidFill>
               </a:rPr>
-              <a:t>•  Cerrar la parte llevando todo lo aprendido al plano de la gobernanza: cómo una organización adopta IA de forma segura, responsable y conforme a la regulación. El alumno aprenderá a aplicar NIST AI RMF e ISO/IEC 42001, a clasificar sistemas según el EU AI Act, y a redactar los artefactos de gobernanza clave: política de uso de IA, registro de riesgos y model card.</a:t>
+              <a:t>•  Cerrar la parte llevando todo lo aprendido al plano de la gobernanza: cómo una organización adopta IA de forma segura, responsable y conforme a la regulación. El alumno aprenderá a aplicar NIST AI…</a:t>
             </a:r>
           </a:p>
         </p:txBody>
@@ -4107,7 +4633,7 @@
                   <a:srgbClr val="0B3D2E"/>
                 </a:solidFill>
               </a:rPr>
-              <a:t>📖 Definiciones y características</a:t>
+              <a:t>🧠 Explicación en profundidad</a:t>
             </a:r>
           </a:p>
         </p:txBody>
@@ -4145,97 +4671,37 @@
                   <a:srgbClr val="22282E"/>
                 </a:solidFill>
               </a:rPr>
-              <a:t>•  Gobernanza de IA: conjunto de políticas, roles y procesos para que la IA se use de forma segura, ética y conforme. Característica: atraviesa seguridad, legal, ética y negocio.</a:t>
-            </a:r>
-          </a:p>
-          <a:p>
-            <a:pPr>
-              <a:spcAft>
-                <a:spcPts val="600"/>
-              </a:spcAft>
-            </a:pPr>
-            <a:r>
-              <a:rPr sz="1500">
-                <a:solidFill>
-                  <a:srgbClr val="22282E"/>
-                </a:solidFill>
-              </a:rPr>
-              <a:t>•  NIST AI RMF – Govern: cultura, políticas y responsabilidades; es transversal a las otras tres funciones (Map, Measure, Manage).</a:t>
-            </a:r>
-          </a:p>
-          <a:p>
-            <a:pPr>
-              <a:spcAft>
-                <a:spcPts val="600"/>
-              </a:spcAft>
-            </a:pPr>
-            <a:r>
-              <a:rPr sz="1500">
-                <a:solidFill>
-                  <a:srgbClr val="22282E"/>
-                </a:solidFill>
-              </a:rPr>
-              <a:t>•  ISO/IEC 42001: norma certificable de sistema de gestión de IA (AIMS), análoga a ISO 27001 para seguridad de la información.</a:t>
-            </a:r>
-          </a:p>
-          <a:p>
-            <a:pPr>
-              <a:spcAft>
-                <a:spcPts val="600"/>
-              </a:spcAft>
-            </a:pPr>
-            <a:r>
-              <a:rPr sz="1500">
-                <a:solidFill>
-                  <a:srgbClr val="22282E"/>
-                </a:solidFill>
-              </a:rPr>
-              <a:t>•  EU AI Act: regulación que clasifica los sistemas en riesgo inaceptable (prohibido), alto, limitado y mínimo, con obligaciones crecientes. Característica: extraterritorial; afecta a quien opere en la UE.</a:t>
-            </a:r>
-          </a:p>
-          <a:p>
-            <a:pPr>
-              <a:spcAft>
-                <a:spcPts val="600"/>
-              </a:spcAft>
-            </a:pPr>
-            <a:r>
-              <a:rPr sz="1500">
-                <a:solidFill>
-                  <a:srgbClr val="22282E"/>
-                </a:solidFill>
-              </a:rPr>
-              <a:t>•  Model card: documento que describe propósito, datos, desempeño, límites, sesgos y riesgos de seguridad de un modelo (Mitchell et al.).</a:t>
-            </a:r>
-          </a:p>
-          <a:p>
-            <a:pPr>
-              <a:spcAft>
-                <a:spcPts val="600"/>
-              </a:spcAft>
-            </a:pPr>
-            <a:r>
-              <a:rPr sz="1500">
-                <a:solidFill>
-                  <a:srgbClr val="22282E"/>
-                </a:solidFill>
-              </a:rPr>
-              <a:t>•  Datasheet for datasets: documenta origen, composición, sesgos y usos previstos de un dataset (Gebru et al.).</a:t>
-            </a:r>
-          </a:p>
-          <a:p>
-            <a:pPr>
-              <a:spcAft>
-                <a:spcPts val="600"/>
-              </a:spcAft>
-            </a:pPr>
-            <a:r>
-              <a:rPr sz="1500">
-                <a:solidFill>
-                  <a:srgbClr val="22282E"/>
-                </a:solidFill>
-              </a:rPr>
-              <a:t>•  Sesgo algorítmico: desviaciones sistemáticas que perjudican a grupos; requiere medición (equidad) y mitigación. Característica: problema técnico y ético a la vez.</a:t>
+              <a:t>•  Gobernar IA asigna propósito, dueño, riesgo, datos, evaluación, monitorización, incidentes y retiro. NIST AI RMF organiza Govern, Map, Measure y Manage; no prescribe una única puntuación ni convierte…</a:t>
+            </a:r>
+          </a:p>
+          <a:p>
+            <a:pPr>
+              <a:spcAft>
+                <a:spcPts val="600"/>
+              </a:spcAft>
+            </a:pPr>
+            <a:r>
+              <a:rPr sz="1500">
+                <a:solidFill>
+                  <a:srgbClr val="22282E"/>
+                </a:solidFill>
+              </a:rPr>
+              <a:t>•  El diagrama debe leerse como una cadena de supuestos: verificar un nodo no demuestra los siguientes. La evaluación declara actor, acceso, datos, métrica, umbral y consecuencia; compara una línea base…</a:t>
+            </a:r>
+          </a:p>
+          <a:p>
+            <a:pPr>
+              <a:spcAft>
+                <a:spcPts val="600"/>
+              </a:spcAft>
+            </a:pPr>
+            <a:r>
+              <a:rPr sz="1500">
+                <a:solidFill>
+                  <a:srgbClr val="22282E"/>
+                </a:solidFill>
+              </a:rPr>
+              <a:t>•  Un modelo pasa exactitud pero carece de mecanismo de apelación. El impacto sobre personas exige controles más allá de performance.</a:t>
             </a:r>
           </a:p>
         </p:txBody>
@@ -4286,7 +4752,7 @@
                   <a:srgbClr val="0B3D2E"/>
                 </a:solidFill>
               </a:rPr>
-              <a:t>🧰 Herramientas y preparación</a:t>
+              <a:t>📔 Glosario operativo</a:t>
             </a:r>
           </a:p>
         </p:txBody>
@@ -4324,52 +4790,52 @@
                   <a:srgbClr val="22282E"/>
                 </a:solidFill>
               </a:rPr>
-              <a:t>•  NIST AI RMF Playbook para acciones sugeridas por función.</a:t>
-            </a:r>
-          </a:p>
-          <a:p>
-            <a:pPr>
-              <a:spcAft>
-                <a:spcPts val="600"/>
-              </a:spcAft>
-            </a:pPr>
-            <a:r>
-              <a:rPr sz="1500">
-                <a:solidFill>
-                  <a:srgbClr val="22282E"/>
-                </a:solidFill>
-              </a:rPr>
-              <a:t>•  Plantillas de model card y datasheet for datasets.</a:t>
-            </a:r>
-          </a:p>
-          <a:p>
-            <a:pPr>
-              <a:spcAft>
-                <a:spcPts val="600"/>
-              </a:spcAft>
-            </a:pPr>
-            <a:r>
-              <a:rPr sz="1500">
-                <a:solidFill>
-                  <a:srgbClr val="22282E"/>
-                </a:solidFill>
-              </a:rPr>
-              <a:t>•  Texto de referencia del EU AI Act y guía de ISO/IEC 42001.</a:t>
-            </a:r>
-          </a:p>
-          <a:p>
-            <a:pPr>
-              <a:spcAft>
-                <a:spcPts val="600"/>
-              </a:spcAft>
-            </a:pPr>
-            <a:r>
-              <a:rPr sz="1500">
-                <a:solidFill>
-                  <a:srgbClr val="22282E"/>
-                </a:solidFill>
-              </a:rPr>
-              <a:t>•  Un sistema de IA de caso (real o de las clases anteriores) para gobernar de extremo a extremo.</a:t>
+              <a:t>•  Término — Definición</a:t>
+            </a:r>
+          </a:p>
+          <a:p>
+            <a:pPr>
+              <a:spcAft>
+                <a:spcPts val="600"/>
+              </a:spcAft>
+            </a:pPr>
+            <a:r>
+              <a:rPr sz="1500">
+                <a:solidFill>
+                  <a:srgbClr val="22282E"/>
+                </a:solidFill>
+              </a:rPr>
+              <a:t>•  Impact assessment — Evaluación contextual de efectos, afectados y mitigaciones.</a:t>
+            </a:r>
+          </a:p>
+          <a:p>
+            <a:pPr>
+              <a:spcAft>
+                <a:spcPts val="600"/>
+              </a:spcAft>
+            </a:pPr>
+            <a:r>
+              <a:rPr sz="1500">
+                <a:solidFill>
+                  <a:srgbClr val="22282E"/>
+                </a:solidFill>
+              </a:rPr>
+              <a:t>•  Evaluación — Experimento reproducible ligado a un riesgo y criterio.</a:t>
+            </a:r>
+          </a:p>
+          <a:p>
+            <a:pPr>
+              <a:spcAft>
+                <a:spcPts val="600"/>
+              </a:spcAft>
+            </a:pPr>
+            <a:r>
+              <a:rPr sz="1500">
+                <a:solidFill>
+                  <a:srgbClr val="22282E"/>
+                </a:solidFill>
+              </a:rPr>
+              <a:t>•  Riesgo residual — Exposición que permanece tras controles.</a:t>
             </a:r>
           </a:p>
         </p:txBody>
@@ -4420,7 +4886,7 @@
                   <a:srgbClr val="0B3D2E"/>
                 </a:solidFill>
               </a:rPr>
-              <a:t>🧪 Laboratorio guiado (gobernanza aplicada)</a:t>
+              <a:t>✅ Criterio de dominio</a:t>
             </a:r>
           </a:p>
         </p:txBody>
@@ -4458,97 +4924,7 @@
                   <a:srgbClr val="22282E"/>
                 </a:solidFill>
               </a:rPr>
-              <a:t>•  Ejercicio documental sobre un sistema de IA de caso.</a:t>
-            </a:r>
-          </a:p>
-          <a:p>
-            <a:pPr>
-              <a:spcAft>
-                <a:spcPts val="600"/>
-              </a:spcAft>
-            </a:pPr>
-            <a:r>
-              <a:rPr sz="1500">
-                <a:solidFill>
-                  <a:srgbClr val="22282E"/>
-                </a:solidFill>
-              </a:rPr>
-              <a:t>•  Elige el sistema. Por ejemplo el asistente RAG de la clase 297 o el detector de anomalías de la 298.</a:t>
-            </a:r>
-          </a:p>
-          <a:p>
-            <a:pPr>
-              <a:spcAft>
-                <a:spcPts val="600"/>
-              </a:spcAft>
-            </a:pPr>
-            <a:r>
-              <a:rPr sz="1500">
-                <a:solidFill>
-                  <a:srgbClr val="22282E"/>
-                </a:solidFill>
-              </a:rPr>
-              <a:t>•  Clasifícalo bajo el EU AI Act. Determina su categoría de riesgo (inaceptable/alto/limitado/mínimo) y lista las obligaciones asociadas (transparencia, supervisión humana, gestión de riesgos, documentación).</a:t>
-            </a:r>
-          </a:p>
-          <a:p>
-            <a:pPr>
-              <a:spcAft>
-                <a:spcPts val="600"/>
-              </a:spcAft>
-            </a:pPr>
-            <a:r>
-              <a:rPr sz="1500">
-                <a:solidFill>
-                  <a:srgbClr val="22282E"/>
-                </a:solidFill>
-              </a:rPr>
-              <a:t>•  Recorre NIST AI RMF.</a:t>
-            </a:r>
-          </a:p>
-          <a:p>
-            <a:pPr>
-              <a:spcAft>
-                <a:spcPts val="600"/>
-              </a:spcAft>
-            </a:pPr>
-            <a:r>
-              <a:rPr sz="1500">
-                <a:solidFill>
-                  <a:srgbClr val="22282E"/>
-                </a:solidFill>
-              </a:rPr>
-              <a:t>•  Map: contexto, propósito, partes interesadas, riesgos (incluye los técnicos de las clases 291–299).</a:t>
-            </a:r>
-          </a:p>
-          <a:p>
-            <a:pPr>
-              <a:spcAft>
-                <a:spcPts val="600"/>
-              </a:spcAft>
-            </a:pPr>
-            <a:r>
-              <a:rPr sz="1500">
-                <a:solidFill>
-                  <a:srgbClr val="22282E"/>
-                </a:solidFill>
-              </a:rPr>
-              <a:t>•  Measure: métricas de desempeño, robustez, sesgo, seguridad (p. ej. tasa de injection exitosa, FPR del detector).</a:t>
-            </a:r>
-          </a:p>
-          <a:p>
-            <a:pPr>
-              <a:spcAft>
-                <a:spcPts val="600"/>
-              </a:spcAft>
-            </a:pPr>
-            <a:r>
-              <a:rPr sz="1500">
-                <a:solidFill>
-                  <a:srgbClr val="22282E"/>
-                </a:solidFill>
-              </a:rPr>
-              <a:t>•  Manage: controles priorizados, plan de respuesta, aceptación/transferencia de riesgo.</a:t>
+              <a:t>•  El alumno demuestra dominio cuando formula un escenario específico, reproduce evidencia, explica límites y diseña controles técnicos y de gobierno sin atribuir certeza al modelo.</a:t>
             </a:r>
           </a:p>
         </p:txBody>
@@ -4599,7 +4975,7 @@
                   <a:srgbClr val="0B3D2E"/>
                 </a:solidFill>
               </a:rPr>
-              <a:t>✍️ Ejercicios</a:t>
+              <a:t>📖 Definiciones y características</a:t>
             </a:r>
           </a:p>
         </p:txBody>
@@ -4637,82 +5013,97 @@
                   <a:srgbClr val="22282E"/>
                 </a:solidFill>
               </a:rPr>
-              <a:t>•  Clasifica tres sistemas distintos bajo el EU AI Act y justifica.</a:t>
-            </a:r>
-          </a:p>
-          <a:p>
-            <a:pPr>
-              <a:spcAft>
-                <a:spcPts val="600"/>
-              </a:spcAft>
-            </a:pPr>
-            <a:r>
-              <a:rPr sz="1500">
-                <a:solidFill>
-                  <a:srgbClr val="22282E"/>
-                </a:solidFill>
-              </a:rPr>
-              <a:t>•  Mapea 5 riesgos técnicos de las clases 291–299 a las funciones del NIST AI RMF.</a:t>
-            </a:r>
-          </a:p>
-          <a:p>
-            <a:pPr>
-              <a:spcAft>
-                <a:spcPts val="600"/>
-              </a:spcAft>
-            </a:pPr>
-            <a:r>
-              <a:rPr sz="1500">
-                <a:solidFill>
-                  <a:srgbClr val="22282E"/>
-                </a:solidFill>
-              </a:rPr>
-              <a:t>•  Redacta 8 cláusulas de una política de uso aceptable de IA generativa.</a:t>
-            </a:r>
-          </a:p>
-          <a:p>
-            <a:pPr>
-              <a:spcAft>
-                <a:spcPts val="600"/>
-              </a:spcAft>
-            </a:pPr>
-            <a:r>
-              <a:rPr sz="1500">
-                <a:solidFill>
-                  <a:srgbClr val="22282E"/>
-                </a:solidFill>
-              </a:rPr>
-              <a:t>•  Completa una model card para un modelo que hayas usado en esta parte.</a:t>
-            </a:r>
-          </a:p>
-          <a:p>
-            <a:pPr>
-              <a:spcAft>
-                <a:spcPts val="600"/>
-              </a:spcAft>
-            </a:pPr>
-            <a:r>
-              <a:rPr sz="1500">
-                <a:solidFill>
-                  <a:srgbClr val="22282E"/>
-                </a:solidFill>
-              </a:rPr>
-              <a:t>•  Diseña la matriz RACI del ciclo de vida de un modelo de producción.</a:t>
-            </a:r>
-          </a:p>
-          <a:p>
-            <a:pPr>
-              <a:spcAft>
-                <a:spcPts val="600"/>
-              </a:spcAft>
-            </a:pPr>
-            <a:r>
-              <a:rPr sz="1500">
-                <a:solidFill>
-                  <a:srgbClr val="22282E"/>
-                </a:solidFill>
-              </a:rPr>
-              <a:t>•  Propón tres métricas de equidad y explica cuándo entran en conflicto.</a:t>
+              <a:t>•  Gobernanza de IA: conjunto de políticas, roles y procesos para que la IA se use de forma segura, ética y conforme. Característica: atraviesa seguridad, legal, ética y negocio.</a:t>
+            </a:r>
+          </a:p>
+          <a:p>
+            <a:pPr>
+              <a:spcAft>
+                <a:spcPts val="600"/>
+              </a:spcAft>
+            </a:pPr>
+            <a:r>
+              <a:rPr sz="1500">
+                <a:solidFill>
+                  <a:srgbClr val="22282E"/>
+                </a:solidFill>
+              </a:rPr>
+              <a:t>•  NIST AI RMF – Govern: cultura, políticas y responsabilidades; es transversal a las otras tres funciones (Map, Measure, Manage).</a:t>
+            </a:r>
+          </a:p>
+          <a:p>
+            <a:pPr>
+              <a:spcAft>
+                <a:spcPts val="600"/>
+              </a:spcAft>
+            </a:pPr>
+            <a:r>
+              <a:rPr sz="1500">
+                <a:solidFill>
+                  <a:srgbClr val="22282E"/>
+                </a:solidFill>
+              </a:rPr>
+              <a:t>•  ISO/IEC 42001: norma certificable de sistema de gestión de IA (AIMS), análoga a ISO 27001 para seguridad de la información.</a:t>
+            </a:r>
+          </a:p>
+          <a:p>
+            <a:pPr>
+              <a:spcAft>
+                <a:spcPts val="600"/>
+              </a:spcAft>
+            </a:pPr>
+            <a:r>
+              <a:rPr sz="1500">
+                <a:solidFill>
+                  <a:srgbClr val="22282E"/>
+                </a:solidFill>
+              </a:rPr>
+              <a:t>•  EU AI Act: regulación que clasifica los sistemas en riesgo inaceptable (prohibido), alto, limitado y mínimo, con obligaciones crecientes. Característica: extraterritorial; afecta a quien opere en la…</a:t>
+            </a:r>
+          </a:p>
+          <a:p>
+            <a:pPr>
+              <a:spcAft>
+                <a:spcPts val="600"/>
+              </a:spcAft>
+            </a:pPr>
+            <a:r>
+              <a:rPr sz="1500">
+                <a:solidFill>
+                  <a:srgbClr val="22282E"/>
+                </a:solidFill>
+              </a:rPr>
+              <a:t>•  Model card: documento que describe propósito, datos, desempeño, límites, sesgos y riesgos de seguridad de un modelo (Mitchell et al.).</a:t>
+            </a:r>
+          </a:p>
+          <a:p>
+            <a:pPr>
+              <a:spcAft>
+                <a:spcPts val="600"/>
+              </a:spcAft>
+            </a:pPr>
+            <a:r>
+              <a:rPr sz="1500">
+                <a:solidFill>
+                  <a:srgbClr val="22282E"/>
+                </a:solidFill>
+              </a:rPr>
+              <a:t>•  Datasheet for datasets: documenta origen, composición, sesgos y usos previstos de un dataset (Gebru et al.).</a:t>
+            </a:r>
+          </a:p>
+          <a:p>
+            <a:pPr>
+              <a:spcAft>
+                <a:spcPts val="600"/>
+              </a:spcAft>
+            </a:pPr>
+            <a:r>
+              <a:rPr sz="1500">
+                <a:solidFill>
+                  <a:srgbClr val="22282E"/>
+                </a:solidFill>
+              </a:rPr>
+              <a:t>•  Sesgo algorítmico: desviaciones sistemáticas que perjudican a grupos; requiere medición (equidad) y mitigación. Característica: problema técnico y ético a la vez.</a:t>
             </a:r>
           </a:p>
         </p:txBody>
@@ -4763,7 +5154,7 @@
                   <a:srgbClr val="0B3D2E"/>
                 </a:solidFill>
               </a:rPr>
-              <a:t>📝 Reto verificable</a:t>
+              <a:t>🧰 Herramientas y preparación</a:t>
             </a:r>
           </a:p>
         </p:txBody>
@@ -4801,22 +5192,52 @@
                   <a:srgbClr val="22282E"/>
                 </a:solidFill>
               </a:rPr>
-              <a:t>•  Entrega un paquete de gobernanza de IA para un sistema concreto que incluya: clasificación EU AI Act justificada, cobertura de las cuatro funciones del NIST AI RMF, una política de uso aceptable, una model card completa y un registro de riesgos con dueños.</a:t>
-            </a:r>
-          </a:p>
-          <a:p>
-            <a:pPr>
-              <a:spcAft>
-                <a:spcPts val="600"/>
-              </a:spcAft>
-            </a:pPr>
-            <a:r>
-              <a:rPr sz="1500">
-                <a:solidFill>
-                  <a:srgbClr val="22282E"/>
-                </a:solidFill>
-              </a:rPr>
-              <a:t>•  Criterio de aceptación: el paquete integra al menos 8 riesgos técnicos vistos en la parte (adversariales, envenenamiento, extracción, prompt injection, excessive agency, etc.), cada uno con un control y un responsable asignado; y la clasificación regulatoria determina obligaciones concretas y verificables. Un comité de riesgo debería poder aprobar o rechazar el despliegue con solo este paquete.</a:t>
+              <a:t>•  NIST AI RMF Playbook para acciones sugeridas por función.</a:t>
+            </a:r>
+          </a:p>
+          <a:p>
+            <a:pPr>
+              <a:spcAft>
+                <a:spcPts val="600"/>
+              </a:spcAft>
+            </a:pPr>
+            <a:r>
+              <a:rPr sz="1500">
+                <a:solidFill>
+                  <a:srgbClr val="22282E"/>
+                </a:solidFill>
+              </a:rPr>
+              <a:t>•  Plantillas de model card y datasheet for datasets.</a:t>
+            </a:r>
+          </a:p>
+          <a:p>
+            <a:pPr>
+              <a:spcAft>
+                <a:spcPts val="600"/>
+              </a:spcAft>
+            </a:pPr>
+            <a:r>
+              <a:rPr sz="1500">
+                <a:solidFill>
+                  <a:srgbClr val="22282E"/>
+                </a:solidFill>
+              </a:rPr>
+              <a:t>•  Texto de referencia del EU AI Act y guía de ISO/IEC 42001.</a:t>
+            </a:r>
+          </a:p>
+          <a:p>
+            <a:pPr>
+              <a:spcAft>
+                <a:spcPts val="600"/>
+              </a:spcAft>
+            </a:pPr>
+            <a:r>
+              <a:rPr sz="1500">
+                <a:solidFill>
+                  <a:srgbClr val="22282E"/>
+                </a:solidFill>
+              </a:rPr>
+              <a:t>•  Un sistema de IA de caso (real o de las clases anteriores) para gobernar de extremo a extremo.</a:t>
             </a:r>
           </a:p>
         </p:txBody>
